--- a/docs/presentacion.pptx
+++ b/docs/presentacion.pptx
@@ -4386,7 +4386,7 @@
                 </a:solidFill>
                 <a:latin typeface="Calibri"/>
               </a:rPr>
-              <a:t>Equipo: [nombres]</a:t>
+              <a:t>Equipo: Santiago Afanador Arguello · Juan Castellanos</a:t>
             </a:r>
           </a:p>
         </p:txBody>
